--- a/cursos/recursos/desequilibrios-de-material/13-sacrificios-de-calidad-ii.pptx
+++ b/cursos/recursos/desequilibrios-de-material/13-sacrificios-de-calidad-ii.pptx
@@ -3485,7 +3485,7 @@
                 </a:solidFill>
                 <a:latin typeface="Calibri"/>
               </a:rPr>
-              <a:t>Pista: Pensá en saltar el caballo desde e2 hasta f4, con la idea de apoyar luego d3-d4 o f2-f4.</a:t>
+              <a:t>Pista: Piensa en saltar el caballo desde e2 hasta f4, con la idea de apoyar luego d3-d4 o f2-f4.</a:t>
             </a:r>
           </a:p>
         </p:txBody>
@@ -3808,7 +3808,7 @@
                 </a:solidFill>
                 <a:latin typeface="Calibri"/>
               </a:rPr>
-              <a:t>Pista: Pensá en retirar la dama a una casilla donde no repita jaques, buscando jugar por la victoria en vez de conformarse con tablas.</a:t>
+              <a:t>Pista: Piensa en retirar la dama a una casilla donde no repita jaques, buscando jugar por la victoria en vez de conformarse con tablas.</a:t>
             </a:r>
           </a:p>
         </p:txBody>
@@ -4131,7 +4131,7 @@
                 </a:solidFill>
                 <a:latin typeface="Calibri"/>
               </a:rPr>
-              <a:t>Pista: Pensá en retirar la dama hacia una casilla activa, dejando el camino libre para que el peón a comience a correr.</a:t>
+              <a:t>Pista: Piensa en retirar la dama hacia una casilla activa, dejando el camino libre para que el peón a comience a correr.</a:t>
             </a:r>
           </a:p>
         </p:txBody>
@@ -4454,7 +4454,7 @@
                 </a:solidFill>
                 <a:latin typeface="Calibri"/>
               </a:rPr>
-              <a:t>Pista: Pensá en retirar la dama a la esquina, apoyando el avance del peón a mientras se mantiene la presión sobre la diagonal.</a:t>
+              <a:t>Pista: Piensa en retirar la dama a la esquina, apoyando el avance del peón a mientras se mantiene la presión sobre la diagonal.</a:t>
             </a:r>
           </a:p>
         </p:txBody>
@@ -4777,7 +4777,7 @@
                 </a:solidFill>
                 <a:latin typeface="Calibri"/>
               </a:rPr>
-              <a:t>Pista: Pensá en colocar el alfil en una casilla desde donde encierre a la torre blanca, impidiéndole moverse.</a:t>
+              <a:t>Pista: Piensa en colocar el alfil en una casilla desde donde encierre a la torre blanca, impidiéndole moverse.</a:t>
             </a:r>
           </a:p>
         </p:txBody>
@@ -5014,7 +5014,7 @@
                 </a:solidFill>
                 <a:latin typeface="Calibri"/>
               </a:rPr>
-              <a:t>•  Cuando tenés compensación posicional pero no una ventaja decisiva, a veces conviene jugar por la victoria evitando la repetición de jugadas, en lugar de conformarte con las tablas.</a:t>
+              <a:t>•  Cuando tienes compensación posicional pero no una ventaja decisiva, a veces conviene jugar por la victoria evitando la repetición de jugadas, en lugar de conformarte con las tablas.</a:t>
             </a:r>
           </a:p>
           <a:p>
@@ -5228,7 +5228,7 @@
                 </a:solidFill>
                 <a:latin typeface="Calibri"/>
               </a:rPr>
-              <a:t>•  Cuando tenés suficiente compensación posicional, no hace falta apurarse a recuperar el material: podés seguir mejorando tu posición hasta que la victoria sea evidente.</a:t>
+              <a:t>•  Cuando tienes suficiente compensación posicional, no hace falta apurarse a recuperar el material: puedes seguir mejorando tu posición hasta que la victoria sea evidente.</a:t>
             </a:r>
           </a:p>
           <a:p>
@@ -5632,7 +5632,7 @@
                 </a:solidFill>
                 <a:latin typeface="Calibri"/>
               </a:rPr>
-              <a:t>Pista: Pensá en avanzar el peón f para impedir que las blancas jueguen f3-f4 con comodidad.</a:t>
+              <a:t>Pista: Piensa en avanzar el peón f para impedir que las blancas jueguen f3-f4 con comodidad.</a:t>
             </a:r>
           </a:p>
         </p:txBody>
@@ -5955,7 +5955,7 @@
                 </a:solidFill>
                 <a:latin typeface="Calibri"/>
               </a:rPr>
-              <a:t>Pista: Pensá en capturar el alfil de f4 con la torre, aceptando entregar calidad sin un objetivo táctico inmediato.</a:t>
+              <a:t>Pista: Piensa en capturar el alfil de f4 con la torre, aceptando entregar calidad sin un objetivo táctico inmediato.</a:t>
             </a:r>
           </a:p>
         </p:txBody>
@@ -6453,7 +6453,7 @@
                 </a:solidFill>
                 <a:latin typeface="Calibri"/>
               </a:rPr>
-              <a:t>Pista: Pensá en una jugada de dama modesta hacia f8, evitando cualquier recuperación inmediata de material.</a:t>
+              <a:t>Pista: Piensa en una jugada de dama modesta hacia f8, evitando cualquier recuperación inmediata de material.</a:t>
             </a:r>
           </a:p>
         </p:txBody>
@@ -6776,7 +6776,7 @@
                 </a:solidFill>
                 <a:latin typeface="Calibri"/>
               </a:rPr>
-              <a:t>Pista: Pensá en infiltrar la dama en la segunda fila, en una casilla clave del flanco de dama.</a:t>
+              <a:t>Pista: Piensa en infiltrar la dama en la segunda fila, en una casilla clave del flanco de dama.</a:t>
             </a:r>
           </a:p>
         </p:txBody>
@@ -7099,7 +7099,7 @@
                 </a:solidFill>
                 <a:latin typeface="Calibri"/>
               </a:rPr>
-              <a:t>Pista: Pensá en retirar la dama hacia d2, completando el cerco sobre las piezas blancas.</a:t>
+              <a:t>Pista: Piensa en retirar la dama hacia d2, completando el cerco sobre las piezas blancas.</a:t>
             </a:r>
           </a:p>
         </p:txBody>
@@ -7336,7 +7336,7 @@
                 </a:solidFill>
                 <a:latin typeface="Calibri"/>
               </a:rPr>
-              <a:t>•  Cuando tenés suficiente compensación posicional, no hace falta apurarse a recuperar el material: podés seguir mejorando tu posición hasta que la victoria sea evidente.</a:t>
+              <a:t>•  Cuando tienes suficiente compensación posicional, no hace falta apurarse a recuperar el material: puedes seguir mejorando tu posición hasta que la victoria sea evidente.</a:t>
             </a:r>
           </a:p>
           <a:p>
@@ -7566,7 +7566,7 @@
                 </a:solidFill>
                 <a:latin typeface="Calibri"/>
               </a:rPr>
-              <a:t>•  Cuando la posición rival carece de un plan constructivo, podés tomarte tu tiempo (23.c3!) para reubicar tus piezas hacia sus mejores casillas antes de decidir el resultado de la partida.</a:t>
+              <a:t>•  Cuando la posición rival carece de un plan constructivo, puedes tomarte tu tiempo (23.c3!) para reubicar tus piezas hacia sus mejores casillas antes de decidir el resultado de la partida.</a:t>
             </a:r>
           </a:p>
         </p:txBody>
@@ -7954,7 +7954,7 @@
                 </a:solidFill>
                 <a:latin typeface="Calibri"/>
               </a:rPr>
-              <a:t>Pista: Pensá en capturar el caballo de f5 con la torre f1, entregando calidad para dañar la estructura de peones negra.</a:t>
+              <a:t>Pista: Piensa en capturar el caballo de f5 con la torre f1, entregando calidad para dañar la estructura de peones negra.</a:t>
             </a:r>
           </a:p>
         </p:txBody>
@@ -8277,7 +8277,7 @@
                 </a:solidFill>
                 <a:latin typeface="Calibri"/>
               </a:rPr>
-              <a:t>Pista: Pensá en avanzar el peón e, ofreciendo otro peón sin capturar nada a cambio de inmediato.</a:t>
+              <a:t>Pista: Piensa en avanzar el peón e, ofreciendo otro peón sin capturar nada a cambio de inmediato.</a:t>
             </a:r>
           </a:p>
         </p:txBody>
@@ -8600,7 +8600,7 @@
                 </a:solidFill>
                 <a:latin typeface="Calibri"/>
               </a:rPr>
-              <a:t>Pista: Pensá en saltar el caballo hacia h4, con la idea de continuar hacia f5.</a:t>
+              <a:t>Pista: Piensa en saltar el caballo hacia h4, con la idea de continuar hacia f5.</a:t>
             </a:r>
           </a:p>
         </p:txBody>
@@ -8923,7 +8923,7 @@
                 </a:solidFill>
                 <a:latin typeface="Calibri"/>
               </a:rPr>
-              <a:t>Pista: Pensá en un modesto avance de peón que refuerce el centro sin comprometer nada.</a:t>
+              <a:t>Pista: Piensa en un modesto avance de peón que refuerce el centro sin comprometer nada.</a:t>
             </a:r>
           </a:p>
         </p:txBody>
@@ -9405,7 +9405,7 @@
                 </a:solidFill>
                 <a:latin typeface="Calibri"/>
               </a:rPr>
-              <a:t>Pista: Pensá en una jugada de alfil que apoye indirectamente la futura llegada del caballo a f5.</a:t>
+              <a:t>Pista: Piensa en una jugada de alfil que apoye indirectamente la futura llegada del caballo a f5.</a:t>
             </a:r>
           </a:p>
         </p:txBody>
@@ -9658,7 +9658,7 @@
                 </a:solidFill>
                 <a:latin typeface="Calibri"/>
               </a:rPr>
-              <a:t>•  Cuando la posición rival carece de un plan constructivo, podés tomarte tu tiempo (23.c3!) para reubicar tus piezas hacia sus mejores casillas antes de decidir el resultado de la partida.</a:t>
+              <a:t>•  Cuando la posición rival carece de un plan constructivo, puedes tomarte tu tiempo (23.c3!) para reubicar tus piezas hacia sus mejores casillas antes de decidir el resultado de la partida.</a:t>
             </a:r>
           </a:p>
         </p:txBody>
@@ -9801,7 +9801,7 @@
                 </a:solidFill>
                 <a:latin typeface="Calibri"/>
               </a:rPr>
-              <a:t>Jugá la posición de Hansen–González Vidal contra el motor con las blancas, buscando el momento justo para el sacrificio de calidad y la ruptura posterior e5-e6. Después revisá Fedoseev–Carlsen identificando exactamente qué pieza rival queda paralizada tras el sacrificio y durante cuántas jugadas sigue sin poder participar.</a:t>
+              <a:t>Juega la posición de Hansen–González Vidal contra el motor con las blancas, buscando el momento justo para el sacrificio de calidad y la ruptura posterior e5-e6. Después revisa Fedoseev–Carlsen identificando exactamente qué pieza rival queda paralizada tras el sacrificio y durante cuántas jugadas sigue sin poder participar.</a:t>
             </a:r>
           </a:p>
           <a:p>
@@ -9833,7 +9833,7 @@
                 </a:solidFill>
                 <a:latin typeface="Calibri"/>
               </a:rPr>
-              <a:t>En la página del curso podés recorrer cada partida con los comentarios, adivinar las jugadas clave en el tablero y continuar cualquier posición contra el motor (Stockfish). La hoja de ejercicios en PDF reúne los momentos clave de esta lección para resolver sin tablero.</a:t>
+              <a:t>En la página del curso puedes recorrer cada partida con los comentarios, adivinar las jugadas clave en el tablero y continuar cualquier posición contra el motor (Stockfish). La hoja de ejercicios en PDF reúne los momentos clave de esta lección para resolver sin tablero.</a:t>
             </a:r>
           </a:p>
         </p:txBody>
@@ -9872,7 +9872,7 @@
                 </a:solidFill>
                 <a:latin typeface="Calibri"/>
               </a:rPr>
-              <a:t>•  Primero recorré la partida completa leyendo los comentarios.</a:t>
+              <a:t>•  Primero recorre la partida completa leyendo los comentarios.</a:t>
             </a:r>
           </a:p>
           <a:p>
@@ -9888,7 +9888,7 @@
                 </a:solidFill>
                 <a:latin typeface="Calibri"/>
               </a:rPr>
-              <a:t>•  Después hacé el modo "adivinar las jugadas clave" hasta acertar todas.</a:t>
+              <a:t>•  Después haz el modo "adivinar las jugadas clave" hasta acertar todas.</a:t>
             </a:r>
           </a:p>
           <a:p>
@@ -9904,7 +9904,7 @@
                 </a:solidFill>
                 <a:latin typeface="Calibri"/>
               </a:rPr>
-              <a:t>•  Por último respondé el cuestionario y anotá con tus palabras las reglas de la lección.</a:t>
+              <a:t>•  Por último responde el cuestionario y anota con tus palabras las reglas de la lección.</a:t>
             </a:r>
           </a:p>
         </p:txBody>
@@ -10349,7 +10349,7 @@
                 </a:solidFill>
                 <a:latin typeface="Calibri"/>
               </a:rPr>
-              <a:t>•  Antes de sacrificar la calidad por iniciativa, identificá con precisión qué complejo de casillas vas a controlar.</a:t>
+              <a:t>•  Antes de sacrificar la calidad por iniciativa, identifica con precisión qué complejo de casillas vas a controlar.</a:t>
             </a:r>
           </a:p>
           <a:p>
@@ -10365,7 +10365,7 @@
                 </a:solidFill>
                 <a:latin typeface="Calibri"/>
               </a:rPr>
-              <a:t>•  Recordá: una calidad de más no vale nada si las torres propias no tienen columnas por donde actuar.</a:t>
+              <a:t>•  Recuerda: una calidad de más no vale nada si las torres propias no tienen columnas por donde actuar.</a:t>
             </a:r>
           </a:p>
           <a:p>
@@ -10381,7 +10381,7 @@
                 </a:solidFill>
                 <a:latin typeface="Calibri"/>
               </a:rPr>
-              <a:t>•  Si recibís la calidad, buscá con urgencia abrir columnas o cambiar el carácter de la posición.</a:t>
+              <a:t>•  Si recibes la calidad, busca con urgencia abrir columnas o cambiar el carácter de la posición.</a:t>
             </a:r>
           </a:p>
           <a:p>
@@ -10413,7 +10413,7 @@
                 </a:solidFill>
                 <a:latin typeface="Calibri"/>
               </a:rPr>
-              <a:t>•  Aprovechá el dominio posicional para paralizar piezas rivales concretas, no sólo para ganar espacio en general.</a:t>
+              <a:t>•  Aprovecha el dominio posicional para paralizar piezas rivales concretas, no sólo para ganar espacio en general.</a:t>
             </a:r>
           </a:p>
         </p:txBody>
@@ -10611,7 +10611,7 @@
                 </a:solidFill>
                 <a:latin typeface="Calibri"/>
               </a:rPr>
-              <a:t>•  Cuando tenés compensación posicional pero no una ventaja decisiva, a veces conviene jugar por la victoria evitando la repetición de jugadas, en lugar de conformarte con las tablas.</a:t>
+              <a:t>•  Cuando tienes compensación posicional pero no una ventaja decisiva, a veces conviene jugar por la victoria evitando la repetición de jugadas, en lugar de conformarte con las tablas.</a:t>
             </a:r>
           </a:p>
           <a:p>
@@ -11015,7 +11015,7 @@
                 </a:solidFill>
                 <a:latin typeface="Calibri"/>
               </a:rPr>
-              <a:t>Pista: Pensá en capturar el alfil de f4 con la torre f8, entregando calidad para reforzar el dominio de las casillas oscuras.</a:t>
+              <a:t>Pista: Piensa en capturar el alfil de f4 con la torre f8, entregando calidad para reforzar el dominio de las casillas oscuras.</a:t>
             </a:r>
           </a:p>
         </p:txBody>
